--- a/docs/presentation/KSTAR_CES_종합방어.pptx
+++ b/docs/presentation/KSTAR_CES_종합방어.pptx
@@ -29101,7 +29101,7 @@
               </a:spcAft>
             </a:pPr>
             <a:r>
-              <a:rPr sz="1150" b="1" i="0">
+              <a:rPr sz="950" b="1" i="0">
                 <a:solidFill>
                   <a:srgbClr val="FFFFFF"/>
                 </a:solidFill>
@@ -29146,7 +29146,7 @@
               </a:spcAft>
             </a:pPr>
             <a:r>
-              <a:rPr sz="1150" b="1" i="0">
+              <a:rPr sz="950" b="1" i="0">
                 <a:solidFill>
                   <a:srgbClr val="FFFFFF"/>
                 </a:solidFill>
@@ -29191,7 +29191,7 @@
               </a:spcAft>
             </a:pPr>
             <a:r>
-              <a:rPr sz="1150" b="1" i="0">
+              <a:rPr sz="950" b="1" i="0">
                 <a:solidFill>
                   <a:srgbClr val="FFFFFF"/>
                 </a:solidFill>
@@ -29236,7 +29236,7 @@
               </a:spcAft>
             </a:pPr>
             <a:r>
-              <a:rPr sz="1150" b="0" i="0">
+              <a:rPr sz="950" b="0" i="0">
                 <a:solidFill>
                   <a:srgbClr val="222B35"/>
                 </a:solidFill>
@@ -29281,7 +29281,7 @@
               </a:spcAft>
             </a:pPr>
             <a:r>
-              <a:rPr sz="1150" b="0" i="0">
+              <a:rPr sz="950" b="0" i="0">
                 <a:solidFill>
                   <a:srgbClr val="222B35"/>
                 </a:solidFill>
@@ -29326,7 +29326,7 @@
               </a:spcAft>
             </a:pPr>
             <a:r>
-              <a:rPr sz="1150" b="1" i="0">
+              <a:rPr sz="950" b="1" i="0">
                 <a:solidFill>
                   <a:srgbClr val="2E9E5B"/>
                 </a:solidFill>
@@ -29459,7 +29459,7 @@
               </a:spcAft>
             </a:pPr>
             <a:r>
-              <a:rPr sz="1150" b="0" i="0">
+              <a:rPr sz="950" b="0" i="0">
                 <a:solidFill>
                   <a:srgbClr val="222B35"/>
                 </a:solidFill>
@@ -29504,7 +29504,7 @@
               </a:spcAft>
             </a:pPr>
             <a:r>
-              <a:rPr sz="1150" b="0" i="0">
+              <a:rPr sz="950" b="0" i="0">
                 <a:solidFill>
                   <a:srgbClr val="222B35"/>
                 </a:solidFill>
@@ -29549,7 +29549,7 @@
               </a:spcAft>
             </a:pPr>
             <a:r>
-              <a:rPr sz="1150" b="1" i="0">
+              <a:rPr sz="950" b="1" i="0">
                 <a:solidFill>
                   <a:srgbClr val="2E9E5B"/>
                 </a:solidFill>
@@ -29638,7 +29638,7 @@
               </a:spcAft>
             </a:pPr>
             <a:r>
-              <a:rPr sz="1150" b="0" i="0">
+              <a:rPr sz="950" b="0" i="0">
                 <a:solidFill>
                   <a:srgbClr val="222B35"/>
                 </a:solidFill>
@@ -29683,7 +29683,7 @@
               </a:spcAft>
             </a:pPr>
             <a:r>
-              <a:rPr sz="1150" b="0" i="0">
+              <a:rPr sz="950" b="0" i="0">
                 <a:solidFill>
                   <a:srgbClr val="222B35"/>
                 </a:solidFill>
@@ -29728,7 +29728,7 @@
               </a:spcAft>
             </a:pPr>
             <a:r>
-              <a:rPr sz="1150" b="1" i="0">
+              <a:rPr sz="950" b="1" i="0">
                 <a:solidFill>
                   <a:srgbClr val="2E9E5B"/>
                 </a:solidFill>
@@ -29861,7 +29861,7 @@
               </a:spcAft>
             </a:pPr>
             <a:r>
-              <a:rPr sz="1150" b="0" i="0">
+              <a:rPr sz="950" b="0" i="0">
                 <a:solidFill>
                   <a:srgbClr val="222B35"/>
                 </a:solidFill>
@@ -29906,13 +29906,13 @@
               </a:spcAft>
             </a:pPr>
             <a:r>
-              <a:rPr sz="1150" b="0" i="0">
+              <a:rPr sz="950" b="0" i="0">
                 <a:solidFill>
                   <a:srgbClr val="222B35"/>
                 </a:solidFill>
                 <a:latin typeface="Malgun Gothic"/>
               </a:rPr>
-              <a:t>B.4가 그 축을 닫았다. Tᵢ 인코더 폭 24 → 260(34k → 879k, 26배)에서 평균 skill이 +0.230/+0.236/+0.235/+0.236/+0.230으로 160 대비 ±0.008이고, 최대 폭의 유의 우세는 1/4이며 V_rot는 불변(+0.250~+0.254)이다. 반대편에서는 21,498 파라미터 b3k8이 컷 모집단에서 백본과 동급이고, B.9의 1,808 파라미터 tcn2k도 인과 GP를 4/4로 이긴다. 상한은 추정기 용량이 아니라 정보이다.</a:t>
+              <a:t>B.4가 그 축을 닫았다. Tᵢ 인코더 폭 24 → 260(34k → 879k, 26배)에서 평균 skill이 +0.230/+0.236/+0.235/+0.236/+0.230으로 160 대비 ±0.008이고, 최대 폭의 유의 우세는 1/4이며 V_rot는 불변(+0.250~+0.254)이다. 반대편에서는 21,498 파라미터 b3k8이 컷 모집단에서 백본과 동급이고, B.9의 1,808 파라미터 tcn2k도 인과 GP를 4/4로 이긴다. 상한은 추정기 용량이 아니라 정보이다. 다만 이 문장은 총합 MSE에 한정된다(§8aq): 타깃 자신의 10 ms 재현성은 본류에서 46 eV, 꼬리를 포함하면 130 eV이고 4차 차분 제곱질량의 46.6%가 상위 1%에 있으므로, 폭·계열이 평평한 것은 지표가 꼬리 통계이기 때문이며 본류에는 아직 2.3~3.4배의 여지가 있다.</a:t>
             </a:r>
           </a:p>
         </p:txBody>
@@ -29951,7 +29951,7 @@
               </a:spcAft>
             </a:pPr>
             <a:r>
-              <a:rPr sz="1150" b="1" i="0">
+              <a:rPr sz="950" b="1" i="0">
                 <a:solidFill>
                   <a:srgbClr val="2E9E5B"/>
                 </a:solidFill>
@@ -34698,7 +34698,7 @@
               </a:spcAft>
             </a:pPr>
             <a:r>
-              <a:rPr sz="1200" b="1" i="0">
+              <a:rPr sz="1050" b="1" i="0">
                 <a:solidFill>
                   <a:srgbClr val="FFFFFF"/>
                 </a:solidFill>
@@ -34743,7 +34743,7 @@
               </a:spcAft>
             </a:pPr>
             <a:r>
-              <a:rPr sz="1200" b="1" i="0">
+              <a:rPr sz="1050" b="1" i="0">
                 <a:solidFill>
                   <a:srgbClr val="FFFFFF"/>
                 </a:solidFill>
@@ -34788,7 +34788,7 @@
               </a:spcAft>
             </a:pPr>
             <a:r>
-              <a:rPr sz="1200" b="1" i="0">
+              <a:rPr sz="1050" b="1" i="0">
                 <a:solidFill>
                   <a:srgbClr val="FFFFFF"/>
                 </a:solidFill>
@@ -34833,7 +34833,7 @@
               </a:spcAft>
             </a:pPr>
             <a:r>
-              <a:rPr sz="1200" b="1" i="0">
+              <a:rPr sz="1050" b="1" i="0">
                 <a:solidFill>
                   <a:srgbClr val="FFFFFF"/>
                 </a:solidFill>
@@ -34853,7 +34853,7 @@
         <p:spPr>
           <a:xfrm>
             <a:off x="594360" y="1737360"/>
-            <a:ext cx="5248656" cy="256032"/>
+            <a:ext cx="5248656" cy="228600"/>
           </a:xfrm>
           <a:prstGeom prst="rect">
             <a:avLst/>
@@ -34878,7 +34878,7 @@
               </a:spcAft>
             </a:pPr>
             <a:r>
-              <a:rPr sz="1200" b="0" i="0">
+              <a:rPr sz="1050" b="0" i="0">
                 <a:solidFill>
                   <a:srgbClr val="222B35"/>
                 </a:solidFill>
@@ -34898,7 +34898,7 @@
         <p:spPr>
           <a:xfrm>
             <a:off x="5989320" y="1737360"/>
-            <a:ext cx="1545336" cy="256032"/>
+            <a:ext cx="1545336" cy="228600"/>
           </a:xfrm>
           <a:prstGeom prst="rect">
             <a:avLst/>
@@ -34923,7 +34923,7 @@
               </a:spcAft>
             </a:pPr>
             <a:r>
-              <a:rPr sz="1200" b="0" i="0">
+              <a:rPr sz="1050" b="0" i="0">
                 <a:solidFill>
                   <a:srgbClr val="222B35"/>
                 </a:solidFill>
@@ -34943,7 +34943,7 @@
         <p:spPr>
           <a:xfrm>
             <a:off x="7680960" y="1737360"/>
-            <a:ext cx="1545336" cy="256032"/>
+            <a:ext cx="1545336" cy="228600"/>
           </a:xfrm>
           <a:prstGeom prst="rect">
             <a:avLst/>
@@ -34968,7 +34968,7 @@
               </a:spcAft>
             </a:pPr>
             <a:r>
-              <a:rPr sz="1200" b="0" i="0">
+              <a:rPr sz="1050" b="0" i="0">
                 <a:solidFill>
                   <a:srgbClr val="222B35"/>
                 </a:solidFill>
@@ -34988,7 +34988,7 @@
         <p:spPr>
           <a:xfrm>
             <a:off x="9372600" y="1737360"/>
-            <a:ext cx="2276856" cy="256032"/>
+            <a:ext cx="2276856" cy="228600"/>
           </a:xfrm>
           <a:prstGeom prst="rect">
             <a:avLst/>
@@ -35013,7 +35013,7 @@
               </a:spcAft>
             </a:pPr>
             <a:r>
-              <a:rPr sz="1200" b="1" i="0">
+              <a:rPr sz="1050" b="1" i="0">
                 <a:solidFill>
                   <a:srgbClr val="2E9E5B"/>
                 </a:solidFill>
@@ -35032,7 +35032,7 @@
         </p:nvSpPr>
         <p:spPr>
           <a:xfrm>
-            <a:off x="502920" y="2002155"/>
+            <a:off x="502920" y="1974723"/>
             <a:ext cx="11201400" cy="9525"/>
           </a:xfrm>
           <a:prstGeom prst="rect">
@@ -35076,8 +35076,8 @@
         </p:nvSpPr>
         <p:spPr>
           <a:xfrm>
-            <a:off x="502920" y="2011680"/>
-            <a:ext cx="11201400" cy="347472"/>
+            <a:off x="502920" y="1984248"/>
+            <a:ext cx="11201400" cy="320040"/>
           </a:xfrm>
           <a:prstGeom prst="rect">
             <a:avLst/>
@@ -35120,8 +35120,8 @@
         </p:nvSpPr>
         <p:spPr>
           <a:xfrm>
-            <a:off x="594360" y="2084832"/>
-            <a:ext cx="5248656" cy="256032"/>
+            <a:off x="594360" y="2057400"/>
+            <a:ext cx="5248656" cy="228600"/>
           </a:xfrm>
           <a:prstGeom prst="rect">
             <a:avLst/>
@@ -35146,7 +35146,7 @@
               </a:spcAft>
             </a:pPr>
             <a:r>
-              <a:rPr sz="1200" b="0" i="0">
+              <a:rPr sz="1050" b="0" i="0">
                 <a:solidFill>
                   <a:srgbClr val="222B35"/>
                 </a:solidFill>
@@ -35165,8 +35165,8 @@
         </p:nvSpPr>
         <p:spPr>
           <a:xfrm>
-            <a:off x="5989320" y="2084832"/>
-            <a:ext cx="1545336" cy="256032"/>
+            <a:off x="5989320" y="2057400"/>
+            <a:ext cx="1545336" cy="228600"/>
           </a:xfrm>
           <a:prstGeom prst="rect">
             <a:avLst/>
@@ -35191,7 +35191,7 @@
               </a:spcAft>
             </a:pPr>
             <a:r>
-              <a:rPr sz="1200" b="0" i="0">
+              <a:rPr sz="1050" b="0" i="0">
                 <a:solidFill>
                   <a:srgbClr val="222B35"/>
                 </a:solidFill>
@@ -35210,8 +35210,8 @@
         </p:nvSpPr>
         <p:spPr>
           <a:xfrm>
-            <a:off x="7680960" y="2084832"/>
-            <a:ext cx="1545336" cy="256032"/>
+            <a:off x="7680960" y="2057400"/>
+            <a:ext cx="1545336" cy="228600"/>
           </a:xfrm>
           <a:prstGeom prst="rect">
             <a:avLst/>
@@ -35236,7 +35236,7 @@
               </a:spcAft>
             </a:pPr>
             <a:r>
-              <a:rPr sz="1200" b="0" i="0">
+              <a:rPr sz="1050" b="0" i="0">
                 <a:solidFill>
                   <a:srgbClr val="222B35"/>
                 </a:solidFill>
@@ -35255,8 +35255,8 @@
         </p:nvSpPr>
         <p:spPr>
           <a:xfrm>
-            <a:off x="9372600" y="2084832"/>
-            <a:ext cx="2276856" cy="256032"/>
+            <a:off x="9372600" y="2057400"/>
+            <a:ext cx="2276856" cy="228600"/>
           </a:xfrm>
           <a:prstGeom prst="rect">
             <a:avLst/>
@@ -35281,7 +35281,7 @@
               </a:spcAft>
             </a:pPr>
             <a:r>
-              <a:rPr sz="1200" b="1" i="0">
+              <a:rPr sz="1050" b="1" i="0">
                 <a:solidFill>
                   <a:srgbClr val="2E9E5B"/>
                 </a:solidFill>
@@ -35300,7 +35300,7 @@
         </p:nvSpPr>
         <p:spPr>
           <a:xfrm>
-            <a:off x="502920" y="2349627"/>
+            <a:off x="502920" y="2294763"/>
             <a:ext cx="11201400" cy="9525"/>
           </a:xfrm>
           <a:prstGeom prst="rect">
@@ -35344,8 +35344,8 @@
         </p:nvSpPr>
         <p:spPr>
           <a:xfrm>
-            <a:off x="594360" y="2432304"/>
-            <a:ext cx="5248656" cy="256032"/>
+            <a:off x="594360" y="2377440"/>
+            <a:ext cx="5248656" cy="228600"/>
           </a:xfrm>
           <a:prstGeom prst="rect">
             <a:avLst/>
@@ -35370,7 +35370,7 @@
               </a:spcAft>
             </a:pPr>
             <a:r>
-              <a:rPr sz="1200" b="0" i="0">
+              <a:rPr sz="1050" b="0" i="0">
                 <a:solidFill>
                   <a:srgbClr val="222B35"/>
                 </a:solidFill>
@@ -35389,8 +35389,8 @@
         </p:nvSpPr>
         <p:spPr>
           <a:xfrm>
-            <a:off x="5989320" y="2432304"/>
-            <a:ext cx="1545336" cy="256032"/>
+            <a:off x="5989320" y="2377440"/>
+            <a:ext cx="1545336" cy="228600"/>
           </a:xfrm>
           <a:prstGeom prst="rect">
             <a:avLst/>
@@ -35415,7 +35415,7 @@
               </a:spcAft>
             </a:pPr>
             <a:r>
-              <a:rPr sz="1200" b="0" i="0">
+              <a:rPr sz="1050" b="0" i="0">
                 <a:solidFill>
                   <a:srgbClr val="222B35"/>
                 </a:solidFill>
@@ -35434,8 +35434,8 @@
         </p:nvSpPr>
         <p:spPr>
           <a:xfrm>
-            <a:off x="7680960" y="2432304"/>
-            <a:ext cx="1545336" cy="256032"/>
+            <a:off x="7680960" y="2377440"/>
+            <a:ext cx="1545336" cy="228600"/>
           </a:xfrm>
           <a:prstGeom prst="rect">
             <a:avLst/>
@@ -35460,7 +35460,7 @@
               </a:spcAft>
             </a:pPr>
             <a:r>
-              <a:rPr sz="1200" b="0" i="0">
+              <a:rPr sz="1050" b="0" i="0">
                 <a:solidFill>
                   <a:srgbClr val="222B35"/>
                 </a:solidFill>
@@ -35479,8 +35479,8 @@
         </p:nvSpPr>
         <p:spPr>
           <a:xfrm>
-            <a:off x="9372600" y="2432304"/>
-            <a:ext cx="2276856" cy="256032"/>
+            <a:off x="9372600" y="2377440"/>
+            <a:ext cx="2276856" cy="228600"/>
           </a:xfrm>
           <a:prstGeom prst="rect">
             <a:avLst/>
@@ -35505,7 +35505,7 @@
               </a:spcAft>
             </a:pPr>
             <a:r>
-              <a:rPr sz="1200" b="1" i="0">
+              <a:rPr sz="1050" b="1" i="0">
                 <a:solidFill>
                   <a:srgbClr val="2E9E5B"/>
                 </a:solidFill>
@@ -35524,7 +35524,7 @@
         </p:nvSpPr>
         <p:spPr>
           <a:xfrm>
-            <a:off x="502920" y="2697099"/>
+            <a:off x="502920" y="2614803"/>
             <a:ext cx="11201400" cy="9525"/>
           </a:xfrm>
           <a:prstGeom prst="rect">
@@ -35568,8 +35568,8 @@
         </p:nvSpPr>
         <p:spPr>
           <a:xfrm>
-            <a:off x="502920" y="2706624"/>
-            <a:ext cx="11201400" cy="347472"/>
+            <a:off x="502920" y="2624328"/>
+            <a:ext cx="11201400" cy="320040"/>
           </a:xfrm>
           <a:prstGeom prst="rect">
             <a:avLst/>
@@ -35612,8 +35612,8 @@
         </p:nvSpPr>
         <p:spPr>
           <a:xfrm>
-            <a:off x="594360" y="2779776"/>
-            <a:ext cx="5248656" cy="256032"/>
+            <a:off x="594360" y="2697480"/>
+            <a:ext cx="5248656" cy="228600"/>
           </a:xfrm>
           <a:prstGeom prst="rect">
             <a:avLst/>
@@ -35638,7 +35638,7 @@
               </a:spcAft>
             </a:pPr>
             <a:r>
-              <a:rPr sz="1200" b="0" i="0">
+              <a:rPr sz="1050" b="0" i="0">
                 <a:solidFill>
                   <a:srgbClr val="222B35"/>
                 </a:solidFill>
@@ -35657,8 +35657,8 @@
         </p:nvSpPr>
         <p:spPr>
           <a:xfrm>
-            <a:off x="5989320" y="2779776"/>
-            <a:ext cx="1545336" cy="256032"/>
+            <a:off x="5989320" y="2697480"/>
+            <a:ext cx="1545336" cy="228600"/>
           </a:xfrm>
           <a:prstGeom prst="rect">
             <a:avLst/>
@@ -35683,7 +35683,7 @@
               </a:spcAft>
             </a:pPr>
             <a:r>
-              <a:rPr sz="1200" b="0" i="0">
+              <a:rPr sz="1050" b="0" i="0">
                 <a:solidFill>
                   <a:srgbClr val="222B35"/>
                 </a:solidFill>
@@ -35702,8 +35702,8 @@
         </p:nvSpPr>
         <p:spPr>
           <a:xfrm>
-            <a:off x="7680960" y="2779776"/>
-            <a:ext cx="1545336" cy="256032"/>
+            <a:off x="7680960" y="2697480"/>
+            <a:ext cx="1545336" cy="228600"/>
           </a:xfrm>
           <a:prstGeom prst="rect">
             <a:avLst/>
@@ -35728,7 +35728,7 @@
               </a:spcAft>
             </a:pPr>
             <a:r>
-              <a:rPr sz="1200" b="0" i="0">
+              <a:rPr sz="1050" b="0" i="0">
                 <a:solidFill>
                   <a:srgbClr val="222B35"/>
                 </a:solidFill>
@@ -35747,8 +35747,8 @@
         </p:nvSpPr>
         <p:spPr>
           <a:xfrm>
-            <a:off x="9372600" y="2779776"/>
-            <a:ext cx="2276856" cy="256032"/>
+            <a:off x="9372600" y="2697480"/>
+            <a:ext cx="2276856" cy="228600"/>
           </a:xfrm>
           <a:prstGeom prst="rect">
             <a:avLst/>
@@ -35773,7 +35773,7 @@
               </a:spcAft>
             </a:pPr>
             <a:r>
-              <a:rPr sz="1200" b="1" i="0">
+              <a:rPr sz="1050" b="1" i="0">
                 <a:solidFill>
                   <a:srgbClr val="2E9E5B"/>
                 </a:solidFill>
@@ -35792,7 +35792,7 @@
         </p:nvSpPr>
         <p:spPr>
           <a:xfrm>
-            <a:off x="502920" y="3044571"/>
+            <a:off x="502920" y="2934843"/>
             <a:ext cx="11201400" cy="9525"/>
           </a:xfrm>
           <a:prstGeom prst="rect">
@@ -35836,8 +35836,8 @@
         </p:nvSpPr>
         <p:spPr>
           <a:xfrm>
-            <a:off x="594360" y="3127248"/>
-            <a:ext cx="5248656" cy="256032"/>
+            <a:off x="594360" y="3017520"/>
+            <a:ext cx="5248656" cy="228600"/>
           </a:xfrm>
           <a:prstGeom prst="rect">
             <a:avLst/>
@@ -35862,7 +35862,7 @@
               </a:spcAft>
             </a:pPr>
             <a:r>
-              <a:rPr sz="1200" b="0" i="0">
+              <a:rPr sz="1050" b="0" i="0">
                 <a:solidFill>
                   <a:srgbClr val="222B35"/>
                 </a:solidFill>
@@ -35881,8 +35881,8 @@
         </p:nvSpPr>
         <p:spPr>
           <a:xfrm>
-            <a:off x="5989320" y="3127248"/>
-            <a:ext cx="1545336" cy="256032"/>
+            <a:off x="5989320" y="3017520"/>
+            <a:ext cx="1545336" cy="228600"/>
           </a:xfrm>
           <a:prstGeom prst="rect">
             <a:avLst/>
@@ -35907,7 +35907,7 @@
               </a:spcAft>
             </a:pPr>
             <a:r>
-              <a:rPr sz="1200" b="0" i="0">
+              <a:rPr sz="1050" b="0" i="0">
                 <a:solidFill>
                   <a:srgbClr val="222B35"/>
                 </a:solidFill>
@@ -35926,8 +35926,8 @@
         </p:nvSpPr>
         <p:spPr>
           <a:xfrm>
-            <a:off x="7680960" y="3127248"/>
-            <a:ext cx="1545336" cy="256032"/>
+            <a:off x="7680960" y="3017520"/>
+            <a:ext cx="1545336" cy="228600"/>
           </a:xfrm>
           <a:prstGeom prst="rect">
             <a:avLst/>
@@ -35952,7 +35952,7 @@
               </a:spcAft>
             </a:pPr>
             <a:r>
-              <a:rPr sz="1200" b="0" i="0">
+              <a:rPr sz="1050" b="0" i="0">
                 <a:solidFill>
                   <a:srgbClr val="222B35"/>
                 </a:solidFill>
@@ -35971,8 +35971,8 @@
         </p:nvSpPr>
         <p:spPr>
           <a:xfrm>
-            <a:off x="9372600" y="3127248"/>
-            <a:ext cx="2276856" cy="256032"/>
+            <a:off x="9372600" y="3017520"/>
+            <a:ext cx="2276856" cy="228600"/>
           </a:xfrm>
           <a:prstGeom prst="rect">
             <a:avLst/>
@@ -35997,7 +35997,7 @@
               </a:spcAft>
             </a:pPr>
             <a:r>
-              <a:rPr sz="1200" b="1" i="0">
+              <a:rPr sz="1050" b="1" i="0">
                 <a:solidFill>
                   <a:srgbClr val="2E9E5B"/>
                 </a:solidFill>
@@ -36016,7 +36016,7 @@
         </p:nvSpPr>
         <p:spPr>
           <a:xfrm>
-            <a:off x="502920" y="3392043"/>
+            <a:off x="502920" y="3254883"/>
             <a:ext cx="11201400" cy="9525"/>
           </a:xfrm>
           <a:prstGeom prst="rect">
@@ -36060,8 +36060,8 @@
         </p:nvSpPr>
         <p:spPr>
           <a:xfrm>
-            <a:off x="502920" y="3401568"/>
-            <a:ext cx="11201400" cy="347472"/>
+            <a:off x="502920" y="3264408"/>
+            <a:ext cx="11201400" cy="320040"/>
           </a:xfrm>
           <a:prstGeom prst="rect">
             <a:avLst/>
@@ -36104,8 +36104,8 @@
         </p:nvSpPr>
         <p:spPr>
           <a:xfrm>
-            <a:off x="594360" y="3474720"/>
-            <a:ext cx="5248656" cy="256032"/>
+            <a:off x="594360" y="3337560"/>
+            <a:ext cx="5248656" cy="228600"/>
           </a:xfrm>
           <a:prstGeom prst="rect">
             <a:avLst/>
@@ -36130,7 +36130,7 @@
               </a:spcAft>
             </a:pPr>
             <a:r>
-              <a:rPr sz="1200" b="0" i="0">
+              <a:rPr sz="1050" b="0" i="0">
                 <a:solidFill>
                   <a:srgbClr val="222B35"/>
                 </a:solidFill>
@@ -36149,8 +36149,8 @@
         </p:nvSpPr>
         <p:spPr>
           <a:xfrm>
-            <a:off x="5989320" y="3474720"/>
-            <a:ext cx="1545336" cy="256032"/>
+            <a:off x="5989320" y="3337560"/>
+            <a:ext cx="1545336" cy="228600"/>
           </a:xfrm>
           <a:prstGeom prst="rect">
             <a:avLst/>
@@ -36175,7 +36175,7 @@
               </a:spcAft>
             </a:pPr>
             <a:r>
-              <a:rPr sz="1200" b="1" i="0">
+              <a:rPr sz="1050" b="1" i="0">
                 <a:solidFill>
                   <a:srgbClr val="13335F"/>
                 </a:solidFill>
@@ -36194,8 +36194,8 @@
         </p:nvSpPr>
         <p:spPr>
           <a:xfrm>
-            <a:off x="7680960" y="3474720"/>
-            <a:ext cx="1545336" cy="256032"/>
+            <a:off x="7680960" y="3337560"/>
+            <a:ext cx="1545336" cy="228600"/>
           </a:xfrm>
           <a:prstGeom prst="rect">
             <a:avLst/>
@@ -36220,7 +36220,7 @@
               </a:spcAft>
             </a:pPr>
             <a:r>
-              <a:rPr sz="1200" b="0" i="0">
+              <a:rPr sz="1050" b="0" i="0">
                 <a:solidFill>
                   <a:srgbClr val="222B35"/>
                 </a:solidFill>
@@ -36239,8 +36239,8 @@
         </p:nvSpPr>
         <p:spPr>
           <a:xfrm>
-            <a:off x="9372600" y="3474720"/>
-            <a:ext cx="2276856" cy="256032"/>
+            <a:off x="9372600" y="3337560"/>
+            <a:ext cx="2276856" cy="228600"/>
           </a:xfrm>
           <a:prstGeom prst="rect">
             <a:avLst/>
@@ -36265,7 +36265,7 @@
               </a:spcAft>
             </a:pPr>
             <a:r>
-              <a:rPr sz="1200" b="1" i="0">
+              <a:rPr sz="1050" b="1" i="0">
                 <a:solidFill>
                   <a:srgbClr val="2E9E5B"/>
                 </a:solidFill>
@@ -36284,7 +36284,7 @@
         </p:nvSpPr>
         <p:spPr>
           <a:xfrm>
-            <a:off x="502920" y="3739515"/>
+            <a:off x="502920" y="3574923"/>
             <a:ext cx="11201400" cy="9525"/>
           </a:xfrm>
           <a:prstGeom prst="rect">
@@ -36328,8 +36328,8 @@
         </p:nvSpPr>
         <p:spPr>
           <a:xfrm>
-            <a:off x="594360" y="3822192"/>
-            <a:ext cx="5248656" cy="256032"/>
+            <a:off x="594360" y="3657600"/>
+            <a:ext cx="5248656" cy="228600"/>
           </a:xfrm>
           <a:prstGeom prst="rect">
             <a:avLst/>
@@ -36354,7 +36354,7 @@
               </a:spcAft>
             </a:pPr>
             <a:r>
-              <a:rPr sz="1200" b="0" i="0">
+              <a:rPr sz="1050" b="0" i="0">
                 <a:solidFill>
                   <a:srgbClr val="222B35"/>
                 </a:solidFill>
@@ -36373,8 +36373,8 @@
         </p:nvSpPr>
         <p:spPr>
           <a:xfrm>
-            <a:off x="5989320" y="3822192"/>
-            <a:ext cx="1545336" cy="256032"/>
+            <a:off x="5989320" y="3657600"/>
+            <a:ext cx="1545336" cy="228600"/>
           </a:xfrm>
           <a:prstGeom prst="rect">
             <a:avLst/>
@@ -36399,7 +36399,7 @@
               </a:spcAft>
             </a:pPr>
             <a:r>
-              <a:rPr sz="1200" b="1" i="0">
+              <a:rPr sz="1050" b="1" i="0">
                 <a:solidFill>
                   <a:srgbClr val="13335F"/>
                 </a:solidFill>
@@ -36418,8 +36418,8 @@
         </p:nvSpPr>
         <p:spPr>
           <a:xfrm>
-            <a:off x="7680960" y="3822192"/>
-            <a:ext cx="1545336" cy="256032"/>
+            <a:off x="7680960" y="3657600"/>
+            <a:ext cx="1545336" cy="228600"/>
           </a:xfrm>
           <a:prstGeom prst="rect">
             <a:avLst/>
@@ -36444,7 +36444,7 @@
               </a:spcAft>
             </a:pPr>
             <a:r>
-              <a:rPr sz="1200" b="0" i="0">
+              <a:rPr sz="1050" b="0" i="0">
                 <a:solidFill>
                   <a:srgbClr val="222B35"/>
                 </a:solidFill>
@@ -36463,8 +36463,8 @@
         </p:nvSpPr>
         <p:spPr>
           <a:xfrm>
-            <a:off x="9372600" y="3822192"/>
-            <a:ext cx="2276856" cy="256032"/>
+            <a:off x="9372600" y="3657600"/>
+            <a:ext cx="2276856" cy="228600"/>
           </a:xfrm>
           <a:prstGeom prst="rect">
             <a:avLst/>
@@ -36489,7 +36489,7 @@
               </a:spcAft>
             </a:pPr>
             <a:r>
-              <a:rPr sz="1200" b="1" i="0">
+              <a:rPr sz="1050" b="1" i="0">
                 <a:solidFill>
                   <a:srgbClr val="2E9E5B"/>
                 </a:solidFill>
@@ -36508,7 +36508,7 @@
         </p:nvSpPr>
         <p:spPr>
           <a:xfrm>
-            <a:off x="502920" y="4086987"/>
+            <a:off x="502920" y="3894963"/>
             <a:ext cx="11201400" cy="9525"/>
           </a:xfrm>
           <a:prstGeom prst="rect">
@@ -36552,8 +36552,8 @@
         </p:nvSpPr>
         <p:spPr>
           <a:xfrm>
-            <a:off x="502920" y="4096512"/>
-            <a:ext cx="11201400" cy="347472"/>
+            <a:off x="502920" y="3904488"/>
+            <a:ext cx="11201400" cy="320040"/>
           </a:xfrm>
           <a:prstGeom prst="rect">
             <a:avLst/>
@@ -36596,8 +36596,8 @@
         </p:nvSpPr>
         <p:spPr>
           <a:xfrm>
-            <a:off x="594360" y="4169664"/>
-            <a:ext cx="5248656" cy="256032"/>
+            <a:off x="594360" y="3977640"/>
+            <a:ext cx="5248656" cy="228600"/>
           </a:xfrm>
           <a:prstGeom prst="rect">
             <a:avLst/>
@@ -36622,7 +36622,7 @@
               </a:spcAft>
             </a:pPr>
             <a:r>
-              <a:rPr sz="1200" b="0" i="0">
+              <a:rPr sz="1050" b="0" i="0">
                 <a:solidFill>
                   <a:srgbClr val="222B35"/>
                 </a:solidFill>
@@ -36641,8 +36641,8 @@
         </p:nvSpPr>
         <p:spPr>
           <a:xfrm>
-            <a:off x="5989320" y="4169664"/>
-            <a:ext cx="1545336" cy="256032"/>
+            <a:off x="5989320" y="3977640"/>
+            <a:ext cx="1545336" cy="228600"/>
           </a:xfrm>
           <a:prstGeom prst="rect">
             <a:avLst/>
@@ -36667,7 +36667,7 @@
               </a:spcAft>
             </a:pPr>
             <a:r>
-              <a:rPr sz="1200" b="0" i="0">
+              <a:rPr sz="1050" b="0" i="0">
                 <a:solidFill>
                   <a:srgbClr val="222B35"/>
                 </a:solidFill>
@@ -36686,8 +36686,8 @@
         </p:nvSpPr>
         <p:spPr>
           <a:xfrm>
-            <a:off x="7680960" y="4169664"/>
-            <a:ext cx="1545336" cy="256032"/>
+            <a:off x="7680960" y="3977640"/>
+            <a:ext cx="1545336" cy="228600"/>
           </a:xfrm>
           <a:prstGeom prst="rect">
             <a:avLst/>
@@ -36712,7 +36712,7 @@
               </a:spcAft>
             </a:pPr>
             <a:r>
-              <a:rPr sz="1200" b="0" i="0">
+              <a:rPr sz="1050" b="0" i="0">
                 <a:solidFill>
                   <a:srgbClr val="222B35"/>
                 </a:solidFill>
@@ -36731,8 +36731,8 @@
         </p:nvSpPr>
         <p:spPr>
           <a:xfrm>
-            <a:off x="9372600" y="4169664"/>
-            <a:ext cx="2276856" cy="256032"/>
+            <a:off x="9372600" y="3977640"/>
+            <a:ext cx="2276856" cy="228600"/>
           </a:xfrm>
           <a:prstGeom prst="rect">
             <a:avLst/>
@@ -36757,7 +36757,7 @@
               </a:spcAft>
             </a:pPr>
             <a:r>
-              <a:rPr sz="1200" b="1" i="0">
+              <a:rPr sz="1050" b="1" i="0">
                 <a:solidFill>
                   <a:srgbClr val="E8743B"/>
                 </a:solidFill>
@@ -36776,7 +36776,7 @@
         </p:nvSpPr>
         <p:spPr>
           <a:xfrm>
-            <a:off x="502920" y="4434459"/>
+            <a:off x="502920" y="4215003"/>
             <a:ext cx="11201400" cy="9525"/>
           </a:xfrm>
           <a:prstGeom prst="rect">
@@ -36820,8 +36820,8 @@
         </p:nvSpPr>
         <p:spPr>
           <a:xfrm>
-            <a:off x="594360" y="4517136"/>
-            <a:ext cx="5248656" cy="256032"/>
+            <a:off x="594360" y="4297680"/>
+            <a:ext cx="5248656" cy="228600"/>
           </a:xfrm>
           <a:prstGeom prst="rect">
             <a:avLst/>
@@ -36846,7 +36846,7 @@
               </a:spcAft>
             </a:pPr>
             <a:r>
-              <a:rPr sz="1200" b="0" i="0">
+              <a:rPr sz="1050" b="0" i="0">
                 <a:solidFill>
                   <a:srgbClr val="222B35"/>
                 </a:solidFill>
@@ -36865,8 +36865,8 @@
         </p:nvSpPr>
         <p:spPr>
           <a:xfrm>
-            <a:off x="5989320" y="4517136"/>
-            <a:ext cx="1545336" cy="256032"/>
+            <a:off x="5989320" y="4297680"/>
+            <a:ext cx="1545336" cy="228600"/>
           </a:xfrm>
           <a:prstGeom prst="rect">
             <a:avLst/>
@@ -36891,7 +36891,7 @@
               </a:spcAft>
             </a:pPr>
             <a:r>
-              <a:rPr sz="1200" b="0" i="0">
+              <a:rPr sz="1050" b="0" i="0">
                 <a:solidFill>
                   <a:srgbClr val="222B35"/>
                 </a:solidFill>
@@ -36910,8 +36910,8 @@
         </p:nvSpPr>
         <p:spPr>
           <a:xfrm>
-            <a:off x="7680960" y="4517136"/>
-            <a:ext cx="1545336" cy="256032"/>
+            <a:off x="7680960" y="4297680"/>
+            <a:ext cx="1545336" cy="228600"/>
           </a:xfrm>
           <a:prstGeom prst="rect">
             <a:avLst/>
@@ -36936,7 +36936,7 @@
               </a:spcAft>
             </a:pPr>
             <a:r>
-              <a:rPr sz="1200" b="1" i="0">
+              <a:rPr sz="1050" b="1" i="0">
                 <a:solidFill>
                   <a:srgbClr val="C0392B"/>
                 </a:solidFill>
@@ -36955,8 +36955,8 @@
         </p:nvSpPr>
         <p:spPr>
           <a:xfrm>
-            <a:off x="9372600" y="4517136"/>
-            <a:ext cx="2276856" cy="256032"/>
+            <a:off x="9372600" y="4297680"/>
+            <a:ext cx="2276856" cy="228600"/>
           </a:xfrm>
           <a:prstGeom prst="rect">
             <a:avLst/>
@@ -36981,7 +36981,7 @@
               </a:spcAft>
             </a:pPr>
             <a:r>
-              <a:rPr sz="1200" b="1" i="0">
+              <a:rPr sz="1050" b="1" i="0">
                 <a:solidFill>
                   <a:srgbClr val="E8743B"/>
                 </a:solidFill>
@@ -37000,7 +37000,7 @@
         </p:nvSpPr>
         <p:spPr>
           <a:xfrm>
-            <a:off x="502920" y="4781931"/>
+            <a:off x="502920" y="4535043"/>
             <a:ext cx="11201400" cy="9525"/>
           </a:xfrm>
           <a:prstGeom prst="rect">
@@ -37044,8 +37044,8 @@
         </p:nvSpPr>
         <p:spPr>
           <a:xfrm>
-            <a:off x="502920" y="4791456"/>
-            <a:ext cx="11201400" cy="347472"/>
+            <a:off x="502920" y="4544568"/>
+            <a:ext cx="11201400" cy="320040"/>
           </a:xfrm>
           <a:prstGeom prst="rect">
             <a:avLst/>
@@ -37088,8 +37088,8 @@
         </p:nvSpPr>
         <p:spPr>
           <a:xfrm>
-            <a:off x="594360" y="4864608"/>
-            <a:ext cx="5248656" cy="256032"/>
+            <a:off x="594360" y="4617720"/>
+            <a:ext cx="5248656" cy="228600"/>
           </a:xfrm>
           <a:prstGeom prst="rect">
             <a:avLst/>
@@ -37114,13 +37114,13 @@
               </a:spcAft>
             </a:pPr>
             <a:r>
-              <a:rPr sz="1200" b="0" i="0">
+              <a:rPr sz="1050" b="0" i="0">
                 <a:solidFill>
                   <a:srgbClr val="222B35"/>
                 </a:solidFill>
                 <a:latin typeface="Malgun Gothic"/>
               </a:rPr>
-              <a:t>본류(peak 외) Tᵢ / Δt &gt; 45 ms</a:t>
+              <a:t>타깃 자신의 10 ms 재현성 상한 (Tᵢ 46~130 eV) 대비 백본 157.8 eV</a:t>
             </a:r>
           </a:p>
         </p:txBody>
@@ -37133,8 +37133,8 @@
         </p:nvSpPr>
         <p:spPr>
           <a:xfrm>
-            <a:off x="5989320" y="4864608"/>
-            <a:ext cx="1545336" cy="256032"/>
+            <a:off x="5989320" y="4617720"/>
+            <a:ext cx="1545336" cy="228600"/>
           </a:xfrm>
           <a:prstGeom prst="rect">
             <a:avLst/>
@@ -37159,13 +37159,13 @@
               </a:spcAft>
             </a:pPr>
             <a:r>
-              <a:rPr sz="1200" b="0" i="0">
-                <a:solidFill>
-                  <a:srgbClr val="222B35"/>
-                </a:solidFill>
-                <a:latin typeface="Malgun Gothic"/>
-              </a:rPr>
-              <a:t>4/4 · PASS</a:t>
+              <a:rPr sz="1050" b="1" i="0">
+                <a:solidFill>
+                  <a:srgbClr val="13335F"/>
+                </a:solidFill>
+                <a:latin typeface="Malgun Gothic"/>
+              </a:rPr>
+              <a:t>같은 자릿수</a:t>
             </a:r>
           </a:p>
         </p:txBody>
@@ -37178,8 +37178,8 @@
         </p:nvSpPr>
         <p:spPr>
           <a:xfrm>
-            <a:off x="7680960" y="4864608"/>
-            <a:ext cx="1545336" cy="256032"/>
+            <a:off x="7680960" y="4617720"/>
+            <a:ext cx="1545336" cy="228600"/>
           </a:xfrm>
           <a:prstGeom prst="rect">
             <a:avLst/>
@@ -37204,13 +37204,13 @@
               </a:spcAft>
             </a:pPr>
             <a:r>
-              <a:rPr sz="1200" b="0" i="0">
+              <a:rPr sz="1050" b="0" i="0">
                 <a:solidFill>
                   <a:srgbClr val="222B35"/>
                 </a:solidFill>
                 <a:latin typeface="Malgun Gothic"/>
               </a:rPr>
-              <a:t>2/4 · 동률</a:t>
+              <a:t>—</a:t>
             </a:r>
           </a:p>
         </p:txBody>
@@ -37223,8 +37223,8 @@
         </p:nvSpPr>
         <p:spPr>
           <a:xfrm>
-            <a:off x="9372600" y="4864608"/>
-            <a:ext cx="2276856" cy="256032"/>
+            <a:off x="9372600" y="4617720"/>
+            <a:ext cx="2276856" cy="228600"/>
           </a:xfrm>
           <a:prstGeom prst="rect">
             <a:avLst/>
@@ -37249,13 +37249,13 @@
               </a:spcAft>
             </a:pPr>
             <a:r>
-              <a:rPr sz="1200" b="1" i="0">
-                <a:solidFill>
-                  <a:srgbClr val="E8743B"/>
-                </a:solidFill>
-                <a:latin typeface="Malgun Gothic"/>
-              </a:rPr>
-              <a:t>조건부</a:t>
+              <a:rPr sz="1050" b="1" i="0">
+                <a:solidFill>
+                  <a:srgbClr val="2B6CB0"/>
+                </a:solidFill>
+                <a:latin typeface="Malgun Gothic"/>
+              </a:rPr>
+              <a:t>보고 (§8aq)</a:t>
             </a:r>
           </a:p>
         </p:txBody>
@@ -37268,7 +37268,7 @@
         </p:nvSpPr>
         <p:spPr>
           <a:xfrm>
-            <a:off x="502920" y="5129403"/>
+            <a:off x="502920" y="4855083"/>
             <a:ext cx="11201400" cy="9525"/>
           </a:xfrm>
           <a:prstGeom prst="rect">
@@ -37312,8 +37312,8 @@
         </p:nvSpPr>
         <p:spPr>
           <a:xfrm>
-            <a:off x="594360" y="5212080"/>
-            <a:ext cx="5248656" cy="256032"/>
+            <a:off x="594360" y="4937760"/>
+            <a:ext cx="5248656" cy="228600"/>
           </a:xfrm>
           <a:prstGeom prst="rect">
             <a:avLst/>
@@ -37338,13 +37338,13 @@
               </a:spcAft>
             </a:pPr>
             <a:r>
-              <a:rPr sz="1200" b="0" i="0">
+              <a:rPr sz="1050" b="0" i="0">
                 <a:solidFill>
                   <a:srgbClr val="222B35"/>
                 </a:solidFill>
                 <a:latin typeface="Malgun Gothic"/>
               </a:rPr>
-              <a:t>MNAR 재가중 Tᵢ vs PCHIP</a:t>
+              <a:t>본류(peak 외) Tᵢ / Δt &gt; 45 ms</a:t>
             </a:r>
           </a:p>
         </p:txBody>
@@ -37357,8 +37357,8 @@
         </p:nvSpPr>
         <p:spPr>
           <a:xfrm>
-            <a:off x="5989320" y="5212080"/>
-            <a:ext cx="1545336" cy="256032"/>
+            <a:off x="5989320" y="4937760"/>
+            <a:ext cx="1545336" cy="228600"/>
           </a:xfrm>
           <a:prstGeom prst="rect">
             <a:avLst/>
@@ -37383,13 +37383,13 @@
               </a:spcAft>
             </a:pPr>
             <a:r>
-              <a:rPr sz="1200" b="0" i="0">
+              <a:rPr sz="1050" b="0" i="0">
                 <a:solidFill>
                   <a:srgbClr val="222B35"/>
                 </a:solidFill>
                 <a:latin typeface="Malgun Gothic"/>
               </a:rPr>
-              <a:t>2/4</a:t>
+              <a:t>4/4 · PASS</a:t>
             </a:r>
           </a:p>
         </p:txBody>
@@ -37402,8 +37402,8 @@
         </p:nvSpPr>
         <p:spPr>
           <a:xfrm>
-            <a:off x="7680960" y="5212080"/>
-            <a:ext cx="1545336" cy="256032"/>
+            <a:off x="7680960" y="4937760"/>
+            <a:ext cx="1545336" cy="228600"/>
           </a:xfrm>
           <a:prstGeom prst="rect">
             <a:avLst/>
@@ -37428,13 +37428,13 @@
               </a:spcAft>
             </a:pPr>
             <a:r>
-              <a:rPr sz="1200" b="0" i="0">
+              <a:rPr sz="1050" b="0" i="0">
                 <a:solidFill>
                   <a:srgbClr val="222B35"/>
                 </a:solidFill>
                 <a:latin typeface="Malgun Gothic"/>
               </a:rPr>
-              <a:t>4/4</a:t>
+              <a:t>2/4 · 동률</a:t>
             </a:r>
           </a:p>
         </p:txBody>
@@ -37447,8 +37447,8 @@
         </p:nvSpPr>
         <p:spPr>
           <a:xfrm>
-            <a:off x="9372600" y="5212080"/>
-            <a:ext cx="2276856" cy="256032"/>
+            <a:off x="9372600" y="4937760"/>
+            <a:ext cx="2276856" cy="228600"/>
           </a:xfrm>
           <a:prstGeom prst="rect">
             <a:avLst/>
@@ -37473,13 +37473,13 @@
               </a:spcAft>
             </a:pPr>
             <a:r>
-              <a:rPr sz="1200" b="1" i="0">
+              <a:rPr sz="1050" b="1" i="0">
                 <a:solidFill>
                   <a:srgbClr val="E8743B"/>
                 </a:solidFill>
                 <a:latin typeface="Malgun Gothic"/>
               </a:rPr>
-              <a:t>조건부 ‡</a:t>
+              <a:t>조건부</a:t>
             </a:r>
           </a:p>
         </p:txBody>
@@ -37492,7 +37492,7 @@
         </p:nvSpPr>
         <p:spPr>
           <a:xfrm>
-            <a:off x="502920" y="5476875"/>
+            <a:off x="502920" y="5175123"/>
             <a:ext cx="11201400" cy="9525"/>
           </a:xfrm>
           <a:prstGeom prst="rect">
@@ -37536,8 +37536,8 @@
         </p:nvSpPr>
         <p:spPr>
           <a:xfrm>
-            <a:off x="502920" y="5486400"/>
-            <a:ext cx="11201400" cy="347472"/>
+            <a:off x="502920" y="5184648"/>
+            <a:ext cx="11201400" cy="320040"/>
           </a:xfrm>
           <a:prstGeom prst="rect">
             <a:avLst/>
@@ -37580,8 +37580,8 @@
         </p:nvSpPr>
         <p:spPr>
           <a:xfrm>
-            <a:off x="594360" y="5559552"/>
-            <a:ext cx="5248656" cy="256032"/>
+            <a:off x="594360" y="5257800"/>
+            <a:ext cx="5248656" cy="228600"/>
           </a:xfrm>
           <a:prstGeom prst="rect">
             <a:avLst/>
@@ -37606,13 +37606,13 @@
               </a:spcAft>
             </a:pPr>
             <a:r>
-              <a:rPr sz="1200" b="0" i="0">
+              <a:rPr sz="1050" b="0" i="0">
                 <a:solidFill>
                   <a:srgbClr val="222B35"/>
                 </a:solidFill>
                 <a:latin typeface="Malgun Gothic"/>
               </a:rPr>
-              <a:t>1 ms 지연 판정</a:t>
+              <a:t>MNAR 재가중 Tᵢ vs PCHIP</a:t>
             </a:r>
           </a:p>
         </p:txBody>
@@ -37625,8 +37625,8 @@
         </p:nvSpPr>
         <p:spPr>
           <a:xfrm>
-            <a:off x="5989320" y="5559552"/>
-            <a:ext cx="1545336" cy="256032"/>
+            <a:off x="5989320" y="5257800"/>
+            <a:ext cx="1545336" cy="228600"/>
           </a:xfrm>
           <a:prstGeom prst="rect">
             <a:avLst/>
@@ -37651,13 +37651,13 @@
               </a:spcAft>
             </a:pPr>
             <a:r>
-              <a:rPr sz="1200" b="1" i="0">
-                <a:solidFill>
-                  <a:srgbClr val="5B6670"/>
-                </a:solidFill>
-                <a:latin typeface="Malgun Gothic"/>
-              </a:rPr>
-              <a:t>보류</a:t>
+              <a:rPr sz="1050" b="0" i="0">
+                <a:solidFill>
+                  <a:srgbClr val="222B35"/>
+                </a:solidFill>
+                <a:latin typeface="Malgun Gothic"/>
+              </a:rPr>
+              <a:t>2/4</a:t>
             </a:r>
           </a:p>
         </p:txBody>
@@ -37670,8 +37670,8 @@
         </p:nvSpPr>
         <p:spPr>
           <a:xfrm>
-            <a:off x="7680960" y="5559552"/>
-            <a:ext cx="1545336" cy="256032"/>
+            <a:off x="7680960" y="5257800"/>
+            <a:ext cx="1545336" cy="228600"/>
           </a:xfrm>
           <a:prstGeom prst="rect">
             <a:avLst/>
@@ -37696,13 +37696,13 @@
               </a:spcAft>
             </a:pPr>
             <a:r>
-              <a:rPr sz="1200" b="0" i="0">
+              <a:rPr sz="1050" b="0" i="0">
                 <a:solidFill>
                   <a:srgbClr val="222B35"/>
                 </a:solidFill>
                 <a:latin typeface="Malgun Gothic"/>
               </a:rPr>
-              <a:t>—</a:t>
+              <a:t>4/4</a:t>
             </a:r>
           </a:p>
         </p:txBody>
@@ -37715,8 +37715,8 @@
         </p:nvSpPr>
         <p:spPr>
           <a:xfrm>
-            <a:off x="9372600" y="5559552"/>
-            <a:ext cx="2276856" cy="256032"/>
+            <a:off x="9372600" y="5257800"/>
+            <a:ext cx="2276856" cy="228600"/>
           </a:xfrm>
           <a:prstGeom prst="rect">
             <a:avLst/>
@@ -37741,13 +37741,13 @@
               </a:spcAft>
             </a:pPr>
             <a:r>
-              <a:rPr sz="1200" b="1" i="0">
-                <a:solidFill>
-                  <a:srgbClr val="5B6670"/>
-                </a:solidFill>
-                <a:latin typeface="Malgun Gothic"/>
-              </a:rPr>
-              <a:t>미결 (p99 산포 21.84배)</a:t>
+              <a:rPr sz="1050" b="1" i="0">
+                <a:solidFill>
+                  <a:srgbClr val="E8743B"/>
+                </a:solidFill>
+                <a:latin typeface="Malgun Gothic"/>
+              </a:rPr>
+              <a:t>조건부 ‡</a:t>
             </a:r>
           </a:p>
         </p:txBody>
@@ -37760,7 +37760,7 @@
         </p:nvSpPr>
         <p:spPr>
           <a:xfrm>
-            <a:off x="502920" y="5824347"/>
+            <a:off x="502920" y="5495163"/>
             <a:ext cx="11201400" cy="9525"/>
           </a:xfrm>
           <a:prstGeom prst="rect">
@@ -37804,8 +37804,8 @@
         </p:nvSpPr>
         <p:spPr>
           <a:xfrm>
-            <a:off x="594360" y="5907024"/>
-            <a:ext cx="5248656" cy="256032"/>
+            <a:off x="594360" y="5577840"/>
+            <a:ext cx="5248656" cy="228600"/>
           </a:xfrm>
           <a:prstGeom prst="rect">
             <a:avLst/>
@@ -37830,13 +37830,13 @@
               </a:spcAft>
             </a:pPr>
             <a:r>
-              <a:rPr sz="1200" b="0" i="0">
+              <a:rPr sz="1050" b="0" i="0">
                 <a:solidFill>
                   <a:srgbClr val="222B35"/>
                 </a:solidFill>
                 <a:latin typeface="Malgun Gothic"/>
               </a:rPr>
-              <a:t>V_rot vs PCHIP (PR4) · 방전 단위 승률 0.48</a:t>
+              <a:t>1 ms 지연 판정</a:t>
             </a:r>
           </a:p>
         </p:txBody>
@@ -37849,8 +37849,8 @@
         </p:nvSpPr>
         <p:spPr>
           <a:xfrm>
-            <a:off x="5989320" y="5907024"/>
-            <a:ext cx="1545336" cy="256032"/>
+            <a:off x="5989320" y="5577840"/>
+            <a:ext cx="1545336" cy="228600"/>
           </a:xfrm>
           <a:prstGeom prst="rect">
             <a:avLst/>
@@ -37875,13 +37875,13 @@
               </a:spcAft>
             </a:pPr>
             <a:r>
-              <a:rPr sz="1200" b="0" i="0">
-                <a:solidFill>
-                  <a:srgbClr val="222B35"/>
-                </a:solidFill>
-                <a:latin typeface="Malgun Gothic"/>
-              </a:rPr>
-              <a:t>1/4</a:t>
+              <a:rPr sz="1050" b="1" i="0">
+                <a:solidFill>
+                  <a:srgbClr val="5B6670"/>
+                </a:solidFill>
+                <a:latin typeface="Malgun Gothic"/>
+              </a:rPr>
+              <a:t>보류</a:t>
             </a:r>
           </a:p>
         </p:txBody>
@@ -37894,8 +37894,8 @@
         </p:nvSpPr>
         <p:spPr>
           <a:xfrm>
-            <a:off x="7680960" y="5907024"/>
-            <a:ext cx="1545336" cy="256032"/>
+            <a:off x="7680960" y="5577840"/>
+            <a:ext cx="1545336" cy="228600"/>
           </a:xfrm>
           <a:prstGeom prst="rect">
             <a:avLst/>
@@ -37920,13 +37920,13 @@
               </a:spcAft>
             </a:pPr>
             <a:r>
-              <a:rPr sz="1200" b="0" i="0">
+              <a:rPr sz="1050" b="0" i="0">
                 <a:solidFill>
                   <a:srgbClr val="222B35"/>
                 </a:solidFill>
                 <a:latin typeface="Malgun Gothic"/>
               </a:rPr>
-              <a:t>2/4</a:t>
+              <a:t>—</a:t>
             </a:r>
           </a:p>
         </p:txBody>
@@ -37939,8 +37939,8 @@
         </p:nvSpPr>
         <p:spPr>
           <a:xfrm>
-            <a:off x="9372600" y="5907024"/>
-            <a:ext cx="2276856" cy="256032"/>
+            <a:off x="9372600" y="5577840"/>
+            <a:ext cx="2276856" cy="228600"/>
           </a:xfrm>
           <a:prstGeom prst="rect">
             <a:avLst/>
@@ -37965,13 +37965,13 @@
               </a:spcAft>
             </a:pPr>
             <a:r>
-              <a:rPr sz="1200" b="1" i="0">
+              <a:rPr sz="1050" b="1" i="0">
                 <a:solidFill>
                   <a:srgbClr val="5B6670"/>
                 </a:solidFill>
                 <a:latin typeface="Malgun Gothic"/>
               </a:rPr>
-              <a:t>미확립 §</a:t>
+              <a:t>미결 (p99 산포 21.84배)</a:t>
             </a:r>
           </a:p>
         </p:txBody>
@@ -37984,7 +37984,7 @@
         </p:nvSpPr>
         <p:spPr>
           <a:xfrm>
-            <a:off x="502920" y="6171819"/>
+            <a:off x="502920" y="5815203"/>
             <a:ext cx="11201400" cy="9525"/>
           </a:xfrm>
           <a:prstGeom prst="rect">
@@ -38022,14 +38022,58 @@
       </p:sp>
       <p:sp>
         <p:nvSpPr>
-          <p:cNvPr id="86" name="TextBox 85"/>
+          <p:cNvPr id="86" name="Rectangle 85"/>
+          <p:cNvSpPr/>
+          <p:nvPr/>
+        </p:nvSpPr>
+        <p:spPr>
+          <a:xfrm>
+            <a:off x="502920" y="5824728"/>
+            <a:ext cx="11201400" cy="320040"/>
+          </a:xfrm>
+          <a:prstGeom prst="rect">
+            <a:avLst/>
+          </a:prstGeom>
+          <a:solidFill>
+            <a:srgbClr val="F4F7FA"/>
+          </a:solidFill>
+          <a:ln>
+            <a:noFill/>
+          </a:ln>
+          <a:effectLst/>
+        </p:spPr>
+        <p:style>
+          <a:lnRef idx="1">
+            <a:schemeClr val="accent1"/>
+          </a:lnRef>
+          <a:fillRef idx="3">
+            <a:schemeClr val="accent1"/>
+          </a:fillRef>
+          <a:effectRef idx="2">
+            <a:schemeClr val="accent1"/>
+          </a:effectRef>
+          <a:fontRef idx="minor">
+            <a:schemeClr val="lt1"/>
+          </a:fontRef>
+        </p:style>
+        <p:txBody>
+          <a:bodyPr rtlCol="0" anchor="ctr"/>
+          <a:lstStyle/>
+          <a:p>
+            <a:pPr algn="ctr"/>
+          </a:p>
+        </p:txBody>
+      </p:sp>
+      <p:sp>
+        <p:nvSpPr>
+          <p:cNvPr id="87" name="TextBox 86"/>
           <p:cNvSpPr txBox="1"/>
           <p:nvPr/>
         </p:nvSpPr>
         <p:spPr>
           <a:xfrm>
-            <a:off x="502920" y="6199632"/>
-            <a:ext cx="11201400" cy="256032"/>
+            <a:off x="594360" y="5897880"/>
+            <a:ext cx="5248656" cy="228600"/>
           </a:xfrm>
           <a:prstGeom prst="rect">
             <a:avLst/>
@@ -38050,17 +38094,241 @@
                 <a:spcPts val="0"/>
               </a:spcBef>
               <a:spcAft>
+                <a:spcPts val="400"/>
+              </a:spcAft>
+            </a:pPr>
+            <a:r>
+              <a:rPr sz="1050" b="0" i="0">
+                <a:solidFill>
+                  <a:srgbClr val="222B35"/>
+                </a:solidFill>
+                <a:latin typeface="Malgun Gothic"/>
+              </a:rPr>
+              <a:t>V_rot vs PCHIP (PR4) · 방전 단위 승률 0.48</a:t>
+            </a:r>
+          </a:p>
+        </p:txBody>
+      </p:sp>
+      <p:sp>
+        <p:nvSpPr>
+          <p:cNvPr id="88" name="TextBox 87"/>
+          <p:cNvSpPr txBox="1"/>
+          <p:nvPr/>
+        </p:nvSpPr>
+        <p:spPr>
+          <a:xfrm>
+            <a:off x="5989320" y="5897880"/>
+            <a:ext cx="1545336" cy="228600"/>
+          </a:xfrm>
+          <a:prstGeom prst="rect">
+            <a:avLst/>
+          </a:prstGeom>
+          <a:noFill/>
+        </p:spPr>
+        <p:txBody>
+          <a:bodyPr wrap="square" anchor="t" lIns="25400" rIns="25400" tIns="12700" bIns="12700">
+            <a:spAutoFit/>
+          </a:bodyPr>
+          <a:lstStyle/>
+          <a:p>
+            <a:pPr algn="ctr">
+              <a:lnSpc>
+                <a:spcPct val="106000"/>
+              </a:lnSpc>
+              <a:spcBef>
+                <a:spcPts val="0"/>
+              </a:spcBef>
+              <a:spcAft>
+                <a:spcPts val="400"/>
+              </a:spcAft>
+            </a:pPr>
+            <a:r>
+              <a:rPr sz="1050" b="0" i="0">
+                <a:solidFill>
+                  <a:srgbClr val="222B35"/>
+                </a:solidFill>
+                <a:latin typeface="Malgun Gothic"/>
+              </a:rPr>
+              <a:t>1/4</a:t>
+            </a:r>
+          </a:p>
+        </p:txBody>
+      </p:sp>
+      <p:sp>
+        <p:nvSpPr>
+          <p:cNvPr id="89" name="TextBox 88"/>
+          <p:cNvSpPr txBox="1"/>
+          <p:nvPr/>
+        </p:nvSpPr>
+        <p:spPr>
+          <a:xfrm>
+            <a:off x="7680960" y="5897880"/>
+            <a:ext cx="1545336" cy="228600"/>
+          </a:xfrm>
+          <a:prstGeom prst="rect">
+            <a:avLst/>
+          </a:prstGeom>
+          <a:noFill/>
+        </p:spPr>
+        <p:txBody>
+          <a:bodyPr wrap="square" anchor="t" lIns="25400" rIns="25400" tIns="12700" bIns="12700">
+            <a:spAutoFit/>
+          </a:bodyPr>
+          <a:lstStyle/>
+          <a:p>
+            <a:pPr algn="ctr">
+              <a:lnSpc>
+                <a:spcPct val="106000"/>
+              </a:lnSpc>
+              <a:spcBef>
+                <a:spcPts val="0"/>
+              </a:spcBef>
+              <a:spcAft>
+                <a:spcPts val="400"/>
+              </a:spcAft>
+            </a:pPr>
+            <a:r>
+              <a:rPr sz="1050" b="0" i="0">
+                <a:solidFill>
+                  <a:srgbClr val="222B35"/>
+                </a:solidFill>
+                <a:latin typeface="Malgun Gothic"/>
+              </a:rPr>
+              <a:t>2/4</a:t>
+            </a:r>
+          </a:p>
+        </p:txBody>
+      </p:sp>
+      <p:sp>
+        <p:nvSpPr>
+          <p:cNvPr id="90" name="TextBox 89"/>
+          <p:cNvSpPr txBox="1"/>
+          <p:nvPr/>
+        </p:nvSpPr>
+        <p:spPr>
+          <a:xfrm>
+            <a:off x="9372600" y="5897880"/>
+            <a:ext cx="2276856" cy="228600"/>
+          </a:xfrm>
+          <a:prstGeom prst="rect">
+            <a:avLst/>
+          </a:prstGeom>
+          <a:noFill/>
+        </p:spPr>
+        <p:txBody>
+          <a:bodyPr wrap="square" anchor="t" lIns="25400" rIns="25400" tIns="12700" bIns="12700">
+            <a:spAutoFit/>
+          </a:bodyPr>
+          <a:lstStyle/>
+          <a:p>
+            <a:pPr algn="ctr">
+              <a:lnSpc>
+                <a:spcPct val="106000"/>
+              </a:lnSpc>
+              <a:spcBef>
+                <a:spcPts val="0"/>
+              </a:spcBef>
+              <a:spcAft>
+                <a:spcPts val="400"/>
+              </a:spcAft>
+            </a:pPr>
+            <a:r>
+              <a:rPr sz="1050" b="1" i="0">
+                <a:solidFill>
+                  <a:srgbClr val="5B6670"/>
+                </a:solidFill>
+                <a:latin typeface="Malgun Gothic"/>
+              </a:rPr>
+              <a:t>미확립 §</a:t>
+            </a:r>
+          </a:p>
+        </p:txBody>
+      </p:sp>
+      <p:sp>
+        <p:nvSpPr>
+          <p:cNvPr id="91" name="Rectangle 90"/>
+          <p:cNvSpPr/>
+          <p:nvPr/>
+        </p:nvSpPr>
+        <p:spPr>
+          <a:xfrm>
+            <a:off x="502920" y="6135243"/>
+            <a:ext cx="11201400" cy="9525"/>
+          </a:xfrm>
+          <a:prstGeom prst="rect">
+            <a:avLst/>
+          </a:prstGeom>
+          <a:solidFill>
+            <a:srgbClr val="E8ECF1"/>
+          </a:solidFill>
+          <a:ln>
+            <a:noFill/>
+          </a:ln>
+          <a:effectLst/>
+        </p:spPr>
+        <p:style>
+          <a:lnRef idx="1">
+            <a:schemeClr val="accent1"/>
+          </a:lnRef>
+          <a:fillRef idx="3">
+            <a:schemeClr val="accent1"/>
+          </a:fillRef>
+          <a:effectRef idx="2">
+            <a:schemeClr val="accent1"/>
+          </a:effectRef>
+          <a:fontRef idx="minor">
+            <a:schemeClr val="lt1"/>
+          </a:fontRef>
+        </p:style>
+        <p:txBody>
+          <a:bodyPr rtlCol="0" anchor="ctr"/>
+          <a:lstStyle/>
+          <a:p>
+            <a:pPr algn="ctr"/>
+          </a:p>
+        </p:txBody>
+      </p:sp>
+      <p:sp>
+        <p:nvSpPr>
+          <p:cNvPr id="92" name="TextBox 91"/>
+          <p:cNvSpPr txBox="1"/>
+          <p:nvPr/>
+        </p:nvSpPr>
+        <p:spPr>
+          <a:xfrm>
+            <a:off x="502920" y="6035040"/>
+            <a:ext cx="11201400" cy="365760"/>
+          </a:xfrm>
+          <a:prstGeom prst="rect">
+            <a:avLst/>
+          </a:prstGeom>
+          <a:noFill/>
+        </p:spPr>
+        <p:txBody>
+          <a:bodyPr wrap="square" anchor="t" lIns="25400" rIns="25400" tIns="12700" bIns="12700">
+            <a:spAutoFit/>
+          </a:bodyPr>
+          <a:lstStyle/>
+          <a:p>
+            <a:pPr algn="l">
+              <a:lnSpc>
+                <a:spcPct val="106000"/>
+              </a:lnSpc>
+              <a:spcBef>
+                <a:spcPts val="0"/>
+              </a:spcBef>
+              <a:spcAft>
                 <a:spcPts val="100"/>
               </a:spcAft>
             </a:pPr>
             <a:r>
-              <a:rPr sz="969" b="0" i="0">
+              <a:rPr sz="1050" b="0" i="0">
                 <a:solidFill>
                   <a:srgbClr val="5B6670"/>
                 </a:solidFill>
                 <a:latin typeface="Malgun Gothic"/>
               </a:rPr>
-              <a:t>†  캠페인 = 한 시간 블록 × 초기화 4개.   ‡  persistence 대비는 두 모집단 4/4.   §  V_rot는 persistence 3/4 · 캠페인 4/4 · Δt &gt; 15 ms PASS(양쪽); 우위는 소수 방전에 집중.   B.9 행은 컷 모집단·통합 301 방전.</a:t>
+              <a:t>†  캠페인 = 한 시간 블록 × 초기화 4개.   ‡  persistence 대비는 두 모집단 4/4.   §  V_rot는 persistence 3/4 · 캠페인 4/4 · Δt &gt; 15 ms PASS(양쪽); 우위는 소수 방전에 집중.   B.9 행은 컷 모집단·통합 301 방전.   §8aq 행은 641파일 전수 차분 상한이다.</a:t>
             </a:r>
           </a:p>
         </p:txBody>

--- a/docs/presentation/KSTAR_CES_종합방어.pptx
+++ b/docs/presentation/KSTAR_CES_종합방어.pptx
@@ -30458,7 +30458,7 @@
               </a:spcAft>
             </a:pPr>
             <a:r>
-              <a:rPr sz="1150" b="1" i="0">
+              <a:rPr sz="950" b="1" i="0">
                 <a:solidFill>
                   <a:srgbClr val="FFFFFF"/>
                 </a:solidFill>
@@ -30503,7 +30503,7 @@
               </a:spcAft>
             </a:pPr>
             <a:r>
-              <a:rPr sz="1150" b="1" i="0">
+              <a:rPr sz="950" b="1" i="0">
                 <a:solidFill>
                   <a:srgbClr val="FFFFFF"/>
                 </a:solidFill>
@@ -30548,7 +30548,7 @@
               </a:spcAft>
             </a:pPr>
             <a:r>
-              <a:rPr sz="1150" b="1" i="0">
+              <a:rPr sz="950" b="1" i="0">
                 <a:solidFill>
                   <a:srgbClr val="FFFFFF"/>
                 </a:solidFill>
@@ -30593,7 +30593,7 @@
               </a:spcAft>
             </a:pPr>
             <a:r>
-              <a:rPr sz="1150" b="0" i="0">
+              <a:rPr sz="950" b="0" i="0">
                 <a:solidFill>
                   <a:srgbClr val="222B35"/>
                 </a:solidFill>
@@ -30638,13 +30638,13 @@
               </a:spcAft>
             </a:pPr>
             <a:r>
-              <a:rPr sz="1150" b="0" i="0">
+              <a:rPr sz="950" b="0" i="0">
                 <a:solidFill>
                   <a:srgbClr val="222B35"/>
                 </a:solidFill>
                 <a:latin typeface="Malgun Gothic"/>
               </a:rPr>
-              <a:t>네 가지가 겹친다. ① 라우팅이 인코더에서 성립하여 빠른 채널을 어떻게 섭동해도 V_rot 출력이 bit-identical이다(no_fast paired +0.000 ×4, 두 모집단). ② 회전의 원인 변수인 NBI 토크가 데이터셋에 없다(Tₑ~V_rot r = +0.024, p = 0.58). ③ 유일한 회전 대리인 Mirnov가 100 Hz 앨리어싱으로 파괴되었다(lag-1 -0.009). ④ PR2 폴백률이 40–44%라 "vs PCHIP"의 2/5가 사실상 vs persistence이다. 그래도 Δt &gt; 15 ms에서는 두 모집단 모두 PCHIP을 이기고 peak 층은 +0.54~+0.79이다.</a:t>
+              <a:t>각운동량 수지를 항별로 감사하면 우리 입력이 닿을 수 있는 항이 남아 있지 않다(§8ar). d/dt(n_i·m_i·&lt;R²&gt;·ω_φ) = -∇·Π_φ + T_NBI + T_NTV + T_int에서 좌변은 측정되고, T_NBI는 0D 채널이 아예 없으며(Tₑ~V_rot r = +0.024, p = 0.58), T_NTV는 Mirnov가 100 Hz로 데시메이트되어 |MC|·rolling RMS가 이미 음성이며(§8b.2, lag-1 -0.009), T_int는 ∇T_i가 필요한데 우리는 스칼라만 갖는다. 유일하게 미검정이던 난류 유속 ∇·Π_turb는 이번에 측정하여 널이었다(BES→dV_rot/dt r = -0.006인 반면 같은 측정이 dT_i/dt에서는 +0.070을 잡는다). 라우팅도 인코더에서 성립하여 빠른 채널을 섭동해도 출력이 bit-identical이다. 그래도 Δt &gt; 15 ms와 peak 층(+0.54~+0.79)에서는 이긴다.</a:t>
             </a:r>
           </a:p>
         </p:txBody>
@@ -30683,7 +30683,7 @@
               </a:spcAft>
             </a:pPr>
             <a:r>
-              <a:rPr sz="1150" b="1" i="0">
+              <a:rPr sz="950" b="1" i="0">
                 <a:solidFill>
                   <a:srgbClr val="2E9E5B"/>
                 </a:solidFill>
@@ -30816,7 +30816,7 @@
               </a:spcAft>
             </a:pPr>
             <a:r>
-              <a:rPr sz="1150" b="0" i="0">
+              <a:rPr sz="950" b="0" i="0">
                 <a:solidFill>
                   <a:srgbClr val="222B35"/>
                 </a:solidFill>
@@ -30861,7 +30861,7 @@
               </a:spcAft>
             </a:pPr>
             <a:r>
-              <a:rPr sz="1150" b="0" i="0">
+              <a:rPr sz="950" b="0" i="0">
                 <a:solidFill>
                   <a:srgbClr val="222B35"/>
                 </a:solidFill>
@@ -30906,7 +30906,7 @@
               </a:spcAft>
             </a:pPr>
             <a:r>
-              <a:rPr sz="1150" b="1" i="0">
+              <a:rPr sz="950" b="1" i="0">
                 <a:solidFill>
                   <a:srgbClr val="2E9E5B"/>
                 </a:solidFill>
@@ -30995,7 +30995,7 @@
               </a:spcAft>
             </a:pPr>
             <a:r>
-              <a:rPr sz="1150" b="0" i="0">
+              <a:rPr sz="950" b="0" i="0">
                 <a:solidFill>
                   <a:srgbClr val="222B35"/>
                 </a:solidFill>
@@ -31040,7 +31040,7 @@
               </a:spcAft>
             </a:pPr>
             <a:r>
-              <a:rPr sz="1150" b="0" i="0">
+              <a:rPr sz="950" b="0" i="0">
                 <a:solidFill>
                   <a:srgbClr val="222B35"/>
                 </a:solidFill>
@@ -31085,7 +31085,7 @@
               </a:spcAft>
             </a:pPr>
             <a:r>
-              <a:rPr sz="1150" b="1" i="0">
+              <a:rPr sz="950" b="1" i="0">
                 <a:solidFill>
                   <a:srgbClr val="2E9E5B"/>
                 </a:solidFill>
@@ -31218,7 +31218,7 @@
               </a:spcAft>
             </a:pPr>
             <a:r>
-              <a:rPr sz="1150" b="0" i="0">
+              <a:rPr sz="950" b="0" i="0">
                 <a:solidFill>
                   <a:srgbClr val="222B35"/>
                 </a:solidFill>
@@ -31263,7 +31263,7 @@
               </a:spcAft>
             </a:pPr>
             <a:r>
-              <a:rPr sz="1150" b="0" i="0">
+              <a:rPr sz="950" b="0" i="0">
                 <a:solidFill>
                   <a:srgbClr val="222B35"/>
                 </a:solidFill>
@@ -31308,7 +31308,7 @@
               </a:spcAft>
             </a:pPr>
             <a:r>
-              <a:rPr sz="1150" b="1" i="0">
+              <a:rPr sz="950" b="1" i="0">
                 <a:solidFill>
                   <a:srgbClr val="2E9E5B"/>
                 </a:solidFill>
